--- a/media/resources/files/4-Amal-AyipSokku_qBaSO0m.pptx
+++ b/media/resources/files/4-Amal-AyipSokku_qBaSO0m.pptx
@@ -16569,7 +16569,7 @@
             </a:pPr>
             <a:r>
               <a:rPr lang="ru-RU" sz="3200" dirty="0"/>
-              <a:t>Турдуу пикирлер учун ыраазычылык билдиребиз.</a:t>
+              <a:t>Түрдүү пикирлер үчүн ыраазычылык билдиребиз.</a:t>
             </a:r>
           </a:p>
           <a:p>

--- a/media/resources/files/4-Amal-AyipSokku_qBaSO0m.pptx
+++ b/media/resources/files/4-Amal-AyipSokku_qBaSO0m.pptx
@@ -3470,7 +3470,7 @@
                 <a:latin typeface="Arial" panose="020B0604020202020204" pitchFamily="34" charset="0"/>
                 <a:cs typeface="Arial" panose="020B0604020202020204" pitchFamily="34" charset="0"/>
               </a:rPr>
-              <a:t>Бул студенттерди тестирлөө үчүн тез </a:t>
+              <a:t>Окуучуну тез текшерүүчү кыска </a:t>
             </a:r>
             <a:r>
               <a:rPr lang="en-GB" sz="2000" dirty="0" err="1">
@@ -3554,7 +3554,7 @@
                 <a:latin typeface="Arial" panose="020B0604020202020204" pitchFamily="34" charset="0"/>
                 <a:cs typeface="Arial" panose="020B0604020202020204" pitchFamily="34" charset="0"/>
               </a:rPr>
-              <a:t>Кийинки суроону берүү үчүн "Кийинки Оюнчу </a:t>
+              <a:t>Кийинки суроо үчүн «Кийинки Оюнчу»</a:t>
             </a:r>
             <a:r>
               <a:rPr lang="en-GB" sz="2000" dirty="0">
@@ -3564,7 +3564,7 @@
                 <a:latin typeface="Arial" panose="020B0604020202020204" pitchFamily="34" charset="0"/>
                 <a:cs typeface="Arial" panose="020B0604020202020204" pitchFamily="34" charset="0"/>
               </a:rPr>
-              <a:t>" </a:t>
+              <a:t> </a:t>
             </a:r>
             <a:r>
               <a:rPr lang="ru-RU" sz="2000" dirty="0">
@@ -3574,7 +3574,7 @@
                 <a:latin typeface="Arial" panose="020B0604020202020204" pitchFamily="34" charset="0"/>
                 <a:cs typeface="Arial" panose="020B0604020202020204" pitchFamily="34" charset="0"/>
               </a:rPr>
-              <a:t>баскычын чыкылдатыңыз.</a:t>
+              <a:t>баскычын басыңыз.</a:t>
             </a:r>
             <a:endParaRPr lang="en-GB" sz="2000" dirty="0">
               <a:solidFill>
